--- a/ai_bob_project.ppt.pptx
+++ b/ai_bob_project.ppt.pptx
@@ -5,7 +5,7 @@
     <p:sldMasterId id="2147483648" r:id="rId1"/>
   </p:sldMasterIdLst>
   <p:notesMasterIdLst>
-    <p:notesMasterId r:id="rId14"/>
+    <p:notesMasterId r:id="rId15"/>
   </p:notesMasterIdLst>
   <p:sldIdLst>
     <p:sldId id="283" r:id="rId2"/>
@@ -17,9 +17,10 @@
     <p:sldId id="286" r:id="rId8"/>
     <p:sldId id="287" r:id="rId9"/>
     <p:sldId id="280" r:id="rId10"/>
-    <p:sldId id="288" r:id="rId11"/>
-    <p:sldId id="289" r:id="rId12"/>
-    <p:sldId id="276" r:id="rId13"/>
+    <p:sldId id="290" r:id="rId11"/>
+    <p:sldId id="288" r:id="rId12"/>
+    <p:sldId id="289" r:id="rId13"/>
+    <p:sldId id="276" r:id="rId14"/>
   </p:sldIdLst>
   <p:sldSz cx="12192000" cy="6858000"/>
   <p:notesSz cx="6858000" cy="9144000"/>
@@ -257,7 +258,7 @@
       <p15:sldGuideLst xmlns:p15="http://schemas.microsoft.com/office/powerpoint/2012/main"/>
     </p:ext>
     <p:ext uri="GoogleSlidesCustomDataVersion2">
-      <go:slidesCustomData xmlns="" xmlns:mc="http://schemas.openxmlformats.org/markup-compatibility/2006" xmlns:mv="urn:schemas-microsoft-com:mac:vml" xmlns:c="http://schemas.openxmlformats.org/drawingml/2006/chart" xmlns:dgm="http://schemas.openxmlformats.org/drawingml/2006/diagram" xmlns:o="urn:schemas-microsoft-com:office:office" xmlns:v="urn:schemas-microsoft-com:vml" xmlns:pvml="urn:schemas-microsoft-com:office:powerpoint" xmlns:com="http://schemas.openxmlformats.org/drawingml/2006/compatibility" xmlns:p14="http://schemas.microsoft.com/office/powerpoint/2010/main" xmlns:p15="http://schemas.microsoft.com/office/powerpoint/2012/main" xmlns:ahyp="http://schemas.microsoft.com/office/drawing/2018/hyperlinkcolor" xmlns:go="http://customooxmlschemas.google.com/" r:id="rId27" roundtripDataSignature="AMtx7mjt3491jQ7aCoyIz2WXeHKroE7tpQ=="/>
+      <go:slidesCustomData xmlns:go="http://customooxmlschemas.google.com/" xmlns:ahyp="http://schemas.microsoft.com/office/drawing/2018/hyperlinkcolor" xmlns:p15="http://schemas.microsoft.com/office/powerpoint/2012/main" xmlns:p14="http://schemas.microsoft.com/office/powerpoint/2010/main" xmlns:com="http://schemas.openxmlformats.org/drawingml/2006/compatibility" xmlns:pvml="urn:schemas-microsoft-com:office:powerpoint" xmlns:v="urn:schemas-microsoft-com:vml" xmlns:o="urn:schemas-microsoft-com:office:office" xmlns:dgm="http://schemas.openxmlformats.org/drawingml/2006/diagram" xmlns:c="http://schemas.openxmlformats.org/drawingml/2006/chart" xmlns:mv="urn:schemas-microsoft-com:mac:vml" xmlns:mc="http://schemas.openxmlformats.org/markup-compatibility/2006" xmlns="" r:id="rId27" roundtripDataSignature="AMtx7mjt3491jQ7aCoyIz2WXeHKroE7tpQ=="/>
     </p:ext>
   </p:extLst>
 </p:presentation>
@@ -11414,6 +11415,96 @@
           <a:chExt cx="0" cy="0"/>
         </a:xfrm>
       </p:grpSpPr>
+      <p:pic>
+        <p:nvPicPr>
+          <p:cNvPr id="5" name="Picture 4">
+            <a:extLst>
+              <a:ext uri="{FF2B5EF4-FFF2-40B4-BE49-F238E27FC236}">
+                <a16:creationId xmlns:a16="http://schemas.microsoft.com/office/drawing/2014/main" id="{5B089ED5-5C4E-E1BF-F8BB-1F12128C642E}"/>
+              </a:ext>
+            </a:extLst>
+          </p:cNvPr>
+          <p:cNvPicPr>
+            <a:picLocks noChangeAspect="1"/>
+          </p:cNvPicPr>
+          <p:nvPr/>
+        </p:nvPicPr>
+        <p:blipFill>
+          <a:blip r:embed="rId2"/>
+          <a:stretch>
+            <a:fillRect/>
+          </a:stretch>
+        </p:blipFill>
+        <p:spPr>
+          <a:xfrm>
+            <a:off x="196645" y="191524"/>
+            <a:ext cx="6499123" cy="3068584"/>
+          </a:xfrm>
+          <a:prstGeom prst="rect">
+            <a:avLst/>
+          </a:prstGeom>
+        </p:spPr>
+      </p:pic>
+      <p:pic>
+        <p:nvPicPr>
+          <p:cNvPr id="7" name="Picture 6">
+            <a:extLst>
+              <a:ext uri="{FF2B5EF4-FFF2-40B4-BE49-F238E27FC236}">
+                <a16:creationId xmlns:a16="http://schemas.microsoft.com/office/drawing/2014/main" id="{A910BA1B-D77F-74C6-833F-283D0CBE22D6}"/>
+              </a:ext>
+            </a:extLst>
+          </p:cNvPr>
+          <p:cNvPicPr>
+            <a:picLocks noChangeAspect="1"/>
+          </p:cNvPicPr>
+          <p:nvPr/>
+        </p:nvPicPr>
+        <p:blipFill>
+          <a:blip r:embed="rId3"/>
+          <a:stretch>
+            <a:fillRect/>
+          </a:stretch>
+        </p:blipFill>
+        <p:spPr>
+          <a:xfrm>
+            <a:off x="4611329" y="3334235"/>
+            <a:ext cx="7414042" cy="3332241"/>
+          </a:xfrm>
+          <a:prstGeom prst="rect">
+            <a:avLst/>
+          </a:prstGeom>
+        </p:spPr>
+      </p:pic>
+    </p:spTree>
+    <p:extLst>
+      <p:ext uri="{BB962C8B-B14F-4D97-AF65-F5344CB8AC3E}">
+        <p14:creationId xmlns:p14="http://schemas.microsoft.com/office/powerpoint/2010/main" val="2980252875"/>
+      </p:ext>
+    </p:extLst>
+  </p:cSld>
+  <p:clrMapOvr>
+    <a:masterClrMapping/>
+  </p:clrMapOvr>
+</p:sld>
+</file>
+
+<file path=ppt/slides/slide11.xml><?xml version="1.0" encoding="utf-8"?>
+<p:sld xmlns:a="http://schemas.openxmlformats.org/drawingml/2006/main" xmlns:r="http://schemas.openxmlformats.org/officeDocument/2006/relationships" xmlns:p="http://schemas.openxmlformats.org/presentationml/2006/main">
+  <p:cSld>
+    <p:spTree>
+      <p:nvGrpSpPr>
+        <p:cNvPr id="1" name=""/>
+        <p:cNvGrpSpPr/>
+        <p:nvPr/>
+      </p:nvGrpSpPr>
+      <p:grpSpPr>
+        <a:xfrm>
+          <a:off x="0" y="0"/>
+          <a:ext cx="0" cy="0"/>
+          <a:chOff x="0" y="0"/>
+          <a:chExt cx="0" cy="0"/>
+        </a:xfrm>
+      </p:grpSpPr>
       <p:sp>
         <p:nvSpPr>
           <p:cNvPr id="6" name="TextBox 5">
@@ -11499,7 +11590,7 @@
 </p:sld>
 </file>
 
-<file path=ppt/slides/slide11.xml><?xml version="1.0" encoding="utf-8"?>
+<file path=ppt/slides/slide12.xml><?xml version="1.0" encoding="utf-8"?>
 <p:sld xmlns:a="http://schemas.openxmlformats.org/drawingml/2006/main" xmlns:r="http://schemas.openxmlformats.org/officeDocument/2006/relationships" xmlns:p="http://schemas.openxmlformats.org/presentationml/2006/main">
   <p:cSld>
     <p:spTree>
@@ -11618,7 +11709,7 @@
 </p:sld>
 </file>
 
-<file path=ppt/slides/slide12.xml><?xml version="1.0" encoding="utf-8"?>
+<file path=ppt/slides/slide13.xml><?xml version="1.0" encoding="utf-8"?>
 <p:sld xmlns:a="http://schemas.openxmlformats.org/drawingml/2006/main" xmlns:r="http://schemas.openxmlformats.org/officeDocument/2006/relationships" xmlns:p="http://schemas.openxmlformats.org/presentationml/2006/main">
   <p:cSld>
     <p:spTree>
